--- a/public/fun/cards/creative/creative-13.pptx
+++ b/public/fun/cards/creative/creative-13.pptx
@@ -3099,111 +3099,14 @@
       <p:grpSpPr/>
       <p:sp>
         <p:nvSpPr>
-          <p:cNvPr id="2" name="Rectangle 1"/>
-          <p:cNvSpPr/>
+          <p:cNvPr id="2" name="텍스트"/>
+          <p:cNvSpPr txBox="1"/>
           <p:nvPr/>
         </p:nvSpPr>
         <p:spPr>
           <a:xfrm>
-            <a:off x="0" y="0"/>
-            <a:ext cx="3240000" cy="720000"/>
-          </a:xfrm>
-          <a:prstGeom prst="rect">
-            <a:avLst/>
-          </a:prstGeom>
-          <a:solidFill>
-            <a:srgbClr val="855A47"/>
-          </a:solidFill>
-          <a:ln>
-            <a:noFill/>
-          </a:ln>
-        </p:spPr>
-        <p:txBody>
-          <a:bodyPr rtlCol="0" anchor="ctr"/>
-          <a:lstStyle/>
-          <a:p>
-            <a:pPr algn="ctr"/>
-          </a:p>
-        </p:txBody>
-      </p:sp>
-      <p:sp>
-        <p:nvSpPr>
-          <p:cNvPr id="3" name="Freeform 2"/>
-          <p:cNvSpPr/>
-          <p:nvPr/>
-        </p:nvSpPr>
-        <p:spPr>
-          <a:xfrm>
-            <a:off x="2692805" y="201024"/>
-            <a:ext cx="302390" cy="287590"/>
-          </a:xfrm>
-          <a:custGeom>
-            <a:avLst/>
-            <a:gdLst/>
-            <a:ahLst/>
-            <a:cxnLst/>
-            <a:rect l="l" t="t" r="r" b="b"/>
-            <a:pathLst>
-              <a:path w="302390" h="287590">
-                <a:moveTo>
-                  <a:pt x="151195" y="0"/>
-                </a:moveTo>
-                <a:lnTo>
-                  <a:pt x="189791" y="105853"/>
-                </a:lnTo>
-                <a:lnTo>
-                  <a:pt x="302390" y="109850"/>
-                </a:lnTo>
-                <a:lnTo>
-                  <a:pt x="213645" y="179267"/>
-                </a:lnTo>
-                <a:lnTo>
-                  <a:pt x="244639" y="287590"/>
-                </a:lnTo>
-                <a:lnTo>
-                  <a:pt x="151195" y="224640"/>
-                </a:lnTo>
-                <a:lnTo>
-                  <a:pt x="57751" y="287590"/>
-                </a:lnTo>
-                <a:lnTo>
-                  <a:pt x="88745" y="179267"/>
-                </a:lnTo>
-                <a:lnTo>
-                  <a:pt x="0" y="109850"/>
-                </a:lnTo>
-                <a:lnTo>
-                  <a:pt x="112599" y="105853"/>
-                </a:lnTo>
-                <a:close/>
-              </a:path>
-            </a:pathLst>
-          </a:custGeom>
-          <a:solidFill>
-            <a:srgbClr val="FFFFFF"/>
-          </a:solidFill>
-          <a:ln>
-            <a:noFill/>
-          </a:ln>
-        </p:spPr>
-        <p:txBody>
-          <a:bodyPr rtlCol="0" anchor="ctr"/>
-          <a:lstStyle/>
-          <a:p>
-            <a:pPr algn="ctr"/>
-          </a:p>
-        </p:txBody>
-      </p:sp>
-      <p:sp>
-        <p:nvSpPr>
-          <p:cNvPr id="4" name="텍스트"/>
-          <p:cNvSpPr txBox="1"/>
-          <p:nvPr/>
-        </p:nvSpPr>
-        <p:spPr>
-          <a:xfrm>
-            <a:off x="230400" y="187200"/>
-            <a:ext cx="2160000" cy="305437"/>
+            <a:off x="252000" y="223200"/>
+            <a:ext cx="2016000" cy="133351"/>
           </a:xfrm>
           <a:prstGeom prst="rect">
             <a:avLst/>
@@ -3218,32 +3121,61 @@
           <a:p>
             <a:pPr algn="l">
               <a:lnSpc>
-                <a:spcPts val="2682"/>
+                <a:spcPts val="1015"/>
               </a:lnSpc>
             </a:pPr>
             <a:r>
-              <a:rPr sz="1850" b="1" spc="50">
+              <a:rPr sz="700" b="1" spc="200">
                 <a:solidFill>
-                  <a:srgbClr val="FFFFFF"/>
+                  <a:srgbClr val="6B7280"/>
                 </a:solidFill>
                 <a:latin typeface="맑은 고딕"/>
                 <a:ea typeface="맑은 고딕"/>
               </a:rPr>
-              <a:t>서나연</a:t>
-            </a:r>
-          </a:p>
-        </p:txBody>
-      </p:sp>
-      <p:sp>
-        <p:nvSpPr>
-          <p:cNvPr id="5" name="텍스트"/>
+              <a:t>스튜디오 이름</a:t>
+            </a:r>
+          </a:p>
+        </p:txBody>
+      </p:sp>
+      <p:sp>
+        <p:nvSpPr>
+          <p:cNvPr id="3" name="Oval 2"/>
+          <p:cNvSpPr/>
+          <p:nvPr/>
+        </p:nvSpPr>
+        <p:spPr>
+          <a:xfrm>
+            <a:off x="2955600" y="241200"/>
+            <a:ext cx="64800" cy="64800"/>
+          </a:xfrm>
+          <a:prstGeom prst="ellipse">
+            <a:avLst/>
+          </a:prstGeom>
+          <a:solidFill>
+            <a:srgbClr val="00A6A6"/>
+          </a:solidFill>
+          <a:ln>
+            <a:noFill/>
+          </a:ln>
+        </p:spPr>
+        <p:txBody>
+          <a:bodyPr rtlCol="0" anchor="ctr"/>
+          <a:lstStyle/>
+          <a:p>
+            <a:pPr algn="ctr"/>
+          </a:p>
+        </p:txBody>
+      </p:sp>
+      <p:sp>
+        <p:nvSpPr>
+          <p:cNvPr id="4" name="텍스트"/>
           <p:cNvSpPr txBox="1"/>
           <p:nvPr/>
         </p:nvSpPr>
         <p:spPr>
           <a:xfrm>
-            <a:off x="230400" y="475200"/>
-            <a:ext cx="2160000" cy="122400"/>
+            <a:off x="252000" y="676800"/>
+            <a:ext cx="2520000" cy="360000"/>
           </a:xfrm>
           <a:prstGeom prst="rect">
             <a:avLst/>
@@ -3258,32 +3190,32 @@
           <a:p>
             <a:pPr algn="l">
               <a:lnSpc>
-                <a:spcPts val="1232"/>
+                <a:spcPts val="3190"/>
               </a:lnSpc>
             </a:pPr>
             <a:r>
-              <a:rPr sz="850" b="1">
+              <a:rPr sz="2200" b="1">
                 <a:solidFill>
-                  <a:srgbClr val="FFFFFF"/>
+                  <a:srgbClr val="12151C"/>
                 </a:solidFill>
                 <a:latin typeface="맑은 고딕"/>
                 <a:ea typeface="맑은 고딕"/>
               </a:rPr>
-              <a:t>영상 감독</a:t>
-            </a:r>
-          </a:p>
-        </p:txBody>
-      </p:sp>
-      <p:sp>
-        <p:nvSpPr>
-          <p:cNvPr id="6" name="텍스트"/>
+              <a:t>서나연</a:t>
+            </a:r>
+          </a:p>
+        </p:txBody>
+      </p:sp>
+      <p:sp>
+        <p:nvSpPr>
+          <p:cNvPr id="5" name="텍스트"/>
           <p:cNvSpPr txBox="1"/>
           <p:nvPr/>
         </p:nvSpPr>
         <p:spPr>
           <a:xfrm>
-            <a:off x="230400" y="835200"/>
-            <a:ext cx="1800000" cy="100800"/>
+            <a:off x="252000" y="1080000"/>
+            <a:ext cx="2520000" cy="171451"/>
           </a:xfrm>
           <a:prstGeom prst="rect">
             <a:avLst/>
@@ -3298,22 +3230,43 @@
           <a:p>
             <a:pPr algn="l">
               <a:lnSpc>
-                <a:spcPts val="1087"/>
+                <a:spcPts val="1305"/>
               </a:lnSpc>
             </a:pPr>
             <a:r>
-              <a:rPr sz="750" b="1" spc="150">
+              <a:rPr sz="900" b="0">
                 <a:solidFill>
-                  <a:srgbClr val="7D706B"/>
+                  <a:srgbClr val="6B7280"/>
                 </a:solidFill>
                 <a:latin typeface="맑은 고딕"/>
                 <a:ea typeface="맑은 고딕"/>
               </a:rPr>
-              <a:t>스튜디오 이름</a:t>
-            </a:r>
-          </a:p>
-        </p:txBody>
-      </p:sp>
+              <a:t>영상 감독</a:t>
+            </a:r>
+          </a:p>
+        </p:txBody>
+      </p:sp>
+      <p:cxnSp>
+        <p:nvCxnSpPr>
+          <p:cNvPr id="6" name="Connector 5"/>
+          <p:cNvCxnSpPr/>
+          <p:nvPr/>
+        </p:nvCxnSpPr>
+        <p:spPr>
+          <a:xfrm>
+            <a:off x="252000" y="1339200"/>
+            <a:ext cx="2736000" cy="0"/>
+          </a:xfrm>
+          <a:prstGeom prst="line">
+            <a:avLst/>
+          </a:prstGeom>
+          <a:ln w="5760">
+            <a:solidFill>
+              <a:srgbClr val="E3E5E9"/>
+            </a:solidFill>
+          </a:ln>
+        </p:spPr>
+      </p:cxnSp>
       <p:sp>
         <p:nvSpPr>
           <p:cNvPr id="7" name="텍스트"/>
@@ -3322,8 +3275,8 @@
         </p:nvSpPr>
         <p:spPr>
           <a:xfrm>
-            <a:off x="230400" y="1015200"/>
-            <a:ext cx="122400" cy="168911"/>
+            <a:off x="252000" y="1411200"/>
+            <a:ext cx="792000" cy="129541"/>
           </a:xfrm>
           <a:prstGeom prst="rect">
             <a:avLst/>
@@ -3338,18 +3291,18 @@
           <a:p>
             <a:pPr algn="l">
               <a:lnSpc>
-                <a:spcPts val="1015"/>
+                <a:spcPts val="986"/>
               </a:lnSpc>
             </a:pPr>
             <a:r>
-              <a:rPr sz="700" b="1">
+              <a:rPr sz="680" b="0">
                 <a:solidFill>
-                  <a:srgbClr val="855A47"/>
+                  <a:srgbClr val="12151C"/>
                 </a:solidFill>
                 <a:latin typeface="맑은 고딕"/>
                 <a:ea typeface="맑은 고딕"/>
               </a:rPr>
-              <a:t>T</a:t>
+              <a:t>010-1234-5678</a:t>
             </a:r>
           </a:p>
         </p:txBody>
@@ -3362,8 +3315,8 @@
         </p:nvSpPr>
         <p:spPr>
           <a:xfrm>
-            <a:off x="374400" y="1015200"/>
-            <a:ext cx="1872000" cy="168911"/>
+            <a:off x="1080000" y="1411200"/>
+            <a:ext cx="900000" cy="129541"/>
           </a:xfrm>
           <a:prstGeom prst="rect">
             <a:avLst/>
@@ -3378,18 +3331,18 @@
           <a:p>
             <a:pPr algn="l">
               <a:lnSpc>
-                <a:spcPts val="1015"/>
+                <a:spcPts val="986"/>
               </a:lnSpc>
             </a:pPr>
             <a:r>
-              <a:rPr sz="700" b="0">
+              <a:rPr sz="680" b="0">
                 <a:solidFill>
-                  <a:srgbClr val="422D24"/>
+                  <a:srgbClr val="12151C"/>
                 </a:solidFill>
                 <a:latin typeface="맑은 고딕"/>
                 <a:ea typeface="맑은 고딕"/>
               </a:rPr>
-              <a:t>010-1234-5678</a:t>
+              <a:t>name@example.com</a:t>
             </a:r>
           </a:p>
         </p:txBody>
@@ -3402,8 +3355,8 @@
         </p:nvSpPr>
         <p:spPr>
           <a:xfrm>
-            <a:off x="230400" y="1184111"/>
-            <a:ext cx="122400" cy="168911"/>
+            <a:off x="2052000" y="1411200"/>
+            <a:ext cx="972000" cy="129541"/>
           </a:xfrm>
           <a:prstGeom prst="rect">
             <a:avLst/>
@@ -3418,18 +3371,18 @@
           <a:p>
             <a:pPr algn="l">
               <a:lnSpc>
-                <a:spcPts val="1015"/>
+                <a:spcPts val="986"/>
               </a:lnSpc>
             </a:pPr>
             <a:r>
-              <a:rPr sz="700" b="1">
+              <a:rPr sz="680" b="0">
                 <a:solidFill>
-                  <a:srgbClr val="855A47"/>
+                  <a:srgbClr val="12151C"/>
                 </a:solidFill>
                 <a:latin typeface="맑은 고딕"/>
                 <a:ea typeface="맑은 고딕"/>
               </a:rPr>
-              <a:t>E</a:t>
+              <a:t>주소를 입력해 주세요</a:t>
             </a:r>
           </a:p>
         </p:txBody>
@@ -3442,8 +3395,8 @@
         </p:nvSpPr>
         <p:spPr>
           <a:xfrm>
-            <a:off x="374400" y="1184111"/>
-            <a:ext cx="1872000" cy="168911"/>
+            <a:off x="252000" y="1526400"/>
+            <a:ext cx="216000" cy="95251"/>
           </a:xfrm>
           <a:prstGeom prst="rect">
             <a:avLst/>
@@ -3458,18 +3411,18 @@
           <a:p>
             <a:pPr algn="l">
               <a:lnSpc>
-                <a:spcPts val="1015"/>
+                <a:spcPts val="725"/>
               </a:lnSpc>
             </a:pPr>
             <a:r>
-              <a:rPr sz="700" b="0">
+              <a:rPr sz="500" b="1" spc="120">
                 <a:solidFill>
-                  <a:srgbClr val="422D24"/>
+                  <a:srgbClr val="6B7280"/>
                 </a:solidFill>
                 <a:latin typeface="맑은 고딕"/>
                 <a:ea typeface="맑은 고딕"/>
               </a:rPr>
-              <a:t>name@example.com</a:t>
+              <a:t>TEL</a:t>
             </a:r>
           </a:p>
         </p:txBody>
@@ -3482,8 +3435,8 @@
         </p:nvSpPr>
         <p:spPr>
           <a:xfrm>
-            <a:off x="230400" y="1353022"/>
-            <a:ext cx="122400" cy="168911"/>
+            <a:off x="1080000" y="1526400"/>
+            <a:ext cx="216000" cy="95251"/>
           </a:xfrm>
           <a:prstGeom prst="rect">
             <a:avLst/>
@@ -3498,18 +3451,18 @@
           <a:p>
             <a:pPr algn="l">
               <a:lnSpc>
-                <a:spcPts val="1015"/>
+                <a:spcPts val="725"/>
               </a:lnSpc>
             </a:pPr>
             <a:r>
-              <a:rPr sz="700" b="1">
+              <a:rPr sz="500" b="1" spc="120">
                 <a:solidFill>
-                  <a:srgbClr val="855A47"/>
+                  <a:srgbClr val="6B7280"/>
                 </a:solidFill>
                 <a:latin typeface="맑은 고딕"/>
                 <a:ea typeface="맑은 고딕"/>
               </a:rPr>
-              <a:t>A</a:t>
+              <a:t>MAIL</a:t>
             </a:r>
           </a:p>
         </p:txBody>
@@ -3522,8 +3475,8 @@
         </p:nvSpPr>
         <p:spPr>
           <a:xfrm>
-            <a:off x="374400" y="1353022"/>
-            <a:ext cx="1872000" cy="168911"/>
+            <a:off x="2052000" y="1526400"/>
+            <a:ext cx="216000" cy="95251"/>
           </a:xfrm>
           <a:prstGeom prst="rect">
             <a:avLst/>
@@ -3538,18 +3491,18 @@
           <a:p>
             <a:pPr algn="l">
               <a:lnSpc>
-                <a:spcPts val="1015"/>
+                <a:spcPts val="725"/>
               </a:lnSpc>
             </a:pPr>
             <a:r>
-              <a:rPr sz="700" b="0">
+              <a:rPr sz="500" b="1" spc="120">
                 <a:solidFill>
-                  <a:srgbClr val="422D24"/>
+                  <a:srgbClr val="6B7280"/>
                 </a:solidFill>
                 <a:latin typeface="맑은 고딕"/>
                 <a:ea typeface="맑은 고딕"/>
               </a:rPr>
-              <a:t>주소를 입력해 주세요</a:t>
+              <a:t>ADDR</a:t>
             </a:r>
           </a:p>
         </p:txBody>
@@ -3568,7 +3521,7 @@
     <p:bg>
       <p:bgPr>
         <a:solidFill>
-          <a:srgbClr val="674637"/>
+          <a:srgbClr val="F3F4F6"/>
         </a:solidFill>
         <a:effectLst/>
       </p:bgPr>
@@ -3582,20 +3535,20 @@
       <p:grpSpPr/>
       <p:sp>
         <p:nvSpPr>
-          <p:cNvPr id="2" name="Rectangle 1"/>
+          <p:cNvPr id="2" name="Oval 1"/>
           <p:cNvSpPr/>
           <p:nvPr/>
         </p:nvSpPr>
         <p:spPr>
           <a:xfrm>
-            <a:off x="0" y="0"/>
-            <a:ext cx="3240000" cy="1800000"/>
+            <a:off x="1411200" y="295200"/>
+            <a:ext cx="417600" cy="417600"/>
           </a:xfrm>
-          <a:prstGeom prst="rect">
+          <a:prstGeom prst="ellipse">
             <a:avLst/>
           </a:prstGeom>
           <a:solidFill>
-            <a:srgbClr val="EBDCD6"/>
+            <a:srgbClr val="00A6A6"/>
           </a:solidFill>
           <a:ln>
             <a:noFill/>
@@ -3611,82 +3564,14 @@
       </p:sp>
       <p:sp>
         <p:nvSpPr>
-          <p:cNvPr id="3" name="Freeform 2"/>
-          <p:cNvSpPr/>
+          <p:cNvPr id="3" name="텍스트"/>
+          <p:cNvSpPr txBox="1"/>
           <p:nvPr/>
         </p:nvSpPr>
         <p:spPr>
           <a:xfrm>
-            <a:off x="1462505" y="374400"/>
-            <a:ext cx="314990" cy="299573"/>
-          </a:xfrm>
-          <a:custGeom>
-            <a:avLst/>
-            <a:gdLst/>
-            <a:ahLst/>
-            <a:cxnLst/>
-            <a:rect l="l" t="t" r="r" b="b"/>
-            <a:pathLst>
-              <a:path w="314990" h="299573">
-                <a:moveTo>
-                  <a:pt x="157495" y="0"/>
-                </a:moveTo>
-                <a:lnTo>
-                  <a:pt x="197700" y="110263"/>
-                </a:lnTo>
-                <a:lnTo>
-                  <a:pt x="314990" y="114427"/>
-                </a:lnTo>
-                <a:lnTo>
-                  <a:pt x="222547" y="186737"/>
-                </a:lnTo>
-                <a:lnTo>
-                  <a:pt x="254832" y="299573"/>
-                </a:lnTo>
-                <a:lnTo>
-                  <a:pt x="157495" y="234000"/>
-                </a:lnTo>
-                <a:lnTo>
-                  <a:pt x="60158" y="299573"/>
-                </a:lnTo>
-                <a:lnTo>
-                  <a:pt x="92443" y="186737"/>
-                </a:lnTo>
-                <a:lnTo>
-                  <a:pt x="0" y="114427"/>
-                </a:lnTo>
-                <a:lnTo>
-                  <a:pt x="117290" y="110263"/>
-                </a:lnTo>
-                <a:close/>
-              </a:path>
-            </a:pathLst>
-          </a:custGeom>
-          <a:solidFill>
-            <a:srgbClr val="595959"/>
-          </a:solidFill>
-          <a:ln>
-            <a:noFill/>
-          </a:ln>
-        </p:spPr>
-        <p:txBody>
-          <a:bodyPr rtlCol="0" anchor="ctr"/>
-          <a:lstStyle/>
-          <a:p>
-            <a:pPr algn="ctr"/>
-          </a:p>
-        </p:txBody>
-      </p:sp>
-      <p:sp>
-        <p:nvSpPr>
-          <p:cNvPr id="4" name="텍스트"/>
-          <p:cNvSpPr txBox="1"/>
-          <p:nvPr/>
-        </p:nvSpPr>
-        <p:spPr>
-          <a:xfrm>
-            <a:off x="396000" y="835200"/>
-            <a:ext cx="2448000" cy="396000"/>
+            <a:off x="1368000" y="324000"/>
+            <a:ext cx="504000" cy="360000"/>
           </a:xfrm>
           <a:prstGeom prst="rect">
             <a:avLst/>
@@ -3701,32 +3586,32 @@
           <a:p>
             <a:pPr algn="ctr">
               <a:lnSpc>
-                <a:spcPts val="1667"/>
+                <a:spcPts val="3769"/>
               </a:lnSpc>
             </a:pPr>
             <a:r>
-              <a:rPr sz="1150" b="1">
+              <a:rPr sz="2600" b="1">
                 <a:solidFill>
-                  <a:srgbClr val="595959"/>
+                  <a:srgbClr val="12151C"/>
                 </a:solidFill>
                 <a:latin typeface="맑은 고딕"/>
                 <a:ea typeface="맑은 고딕"/>
               </a:rPr>
-              <a:t>작은 로고에 큰 마음을 담아</a:t>
-            </a:r>
-          </a:p>
-        </p:txBody>
-      </p:sp>
-      <p:sp>
-        <p:nvSpPr>
-          <p:cNvPr id="5" name="텍스트"/>
+              <a:t>스</a:t>
+            </a:r>
+          </a:p>
+        </p:txBody>
+      </p:sp>
+      <p:sp>
+        <p:nvSpPr>
+          <p:cNvPr id="4" name="텍스트"/>
           <p:cNvSpPr txBox="1"/>
           <p:nvPr/>
         </p:nvSpPr>
         <p:spPr>
           <a:xfrm>
-            <a:off x="360000" y="1476000"/>
-            <a:ext cx="2520000" cy="108000"/>
+            <a:off x="360000" y="820800"/>
+            <a:ext cx="2520000" cy="161926"/>
           </a:xfrm>
           <a:prstGeom prst="rect">
             <a:avLst/>
@@ -3741,18 +3626,87 @@
           <a:p>
             <a:pPr algn="ctr">
               <a:lnSpc>
-                <a:spcPts val="1015"/>
+                <a:spcPts val="1232"/>
               </a:lnSpc>
             </a:pPr>
             <a:r>
-              <a:rPr sz="700" b="1" spc="300">
+              <a:rPr sz="850" b="1" spc="200">
                 <a:solidFill>
-                  <a:srgbClr val="595959"/>
+                  <a:srgbClr val="12151C"/>
                 </a:solidFill>
                 <a:latin typeface="맑은 고딕"/>
                 <a:ea typeface="맑은 고딕"/>
               </a:rPr>
               <a:t>스튜디오 이름</a:t>
+            </a:r>
+          </a:p>
+        </p:txBody>
+      </p:sp>
+      <p:sp>
+        <p:nvSpPr>
+          <p:cNvPr id="5" name="Rectangle 4"/>
+          <p:cNvSpPr/>
+          <p:nvPr/>
+        </p:nvSpPr>
+        <p:spPr>
+          <a:xfrm>
+            <a:off x="1530000" y="1051200"/>
+            <a:ext cx="180000" cy="14400"/>
+          </a:xfrm>
+          <a:prstGeom prst="rect">
+            <a:avLst/>
+          </a:prstGeom>
+          <a:solidFill>
+            <a:srgbClr val="00A6A6"/>
+          </a:solidFill>
+          <a:ln>
+            <a:noFill/>
+          </a:ln>
+        </p:spPr>
+        <p:txBody>
+          <a:bodyPr rtlCol="0" anchor="ctr"/>
+          <a:lstStyle/>
+          <a:p>
+            <a:pPr algn="ctr"/>
+          </a:p>
+        </p:txBody>
+      </p:sp>
+      <p:sp>
+        <p:nvSpPr>
+          <p:cNvPr id="6" name="텍스트"/>
+          <p:cNvSpPr txBox="1"/>
+          <p:nvPr/>
+        </p:nvSpPr>
+        <p:spPr>
+          <a:xfrm>
+            <a:off x="540000" y="1188000"/>
+            <a:ext cx="2160000" cy="360000"/>
+          </a:xfrm>
+          <a:prstGeom prst="rect">
+            <a:avLst/>
+          </a:prstGeom>
+          <a:noFill/>
+        </p:spPr>
+        <p:txBody>
+          <a:bodyPr wrap="square" lIns="0" rIns="0" tIns="0" bIns="0" anchor="t">
+            <a:spAutoFit/>
+          </a:bodyPr>
+          <a:lstStyle/>
+          <a:p>
+            <a:pPr algn="ctr">
+              <a:lnSpc>
+                <a:spcPts val="1305"/>
+              </a:lnSpc>
+            </a:pPr>
+            <a:r>
+              <a:rPr sz="900" b="1">
+                <a:solidFill>
+                  <a:srgbClr val="6B7280"/>
+                </a:solidFill>
+                <a:latin typeface="맑은 고딕"/>
+                <a:ea typeface="맑은 고딕"/>
+              </a:rPr>
+              <a:t>작은 로고에 큰 마음을 담아</a:t>
             </a:r>
           </a:p>
         </p:txBody>

--- a/public/fun/cards/creative/creative-13.pptx
+++ b/public/fun/cards/creative/creative-13.pptx
@@ -3099,56 +3099,45 @@
       <p:grpSpPr/>
       <p:sp>
         <p:nvSpPr>
-          <p:cNvPr id="2" name="텍스트"/>
-          <p:cNvSpPr txBox="1"/>
+          <p:cNvPr id="2" name="Rectangle 1"/>
+          <p:cNvSpPr/>
           <p:nvPr/>
         </p:nvSpPr>
         <p:spPr>
           <a:xfrm>
-            <a:off x="252000" y="223200"/>
-            <a:ext cx="2016000" cy="133351"/>
+            <a:off x="93600" y="93600"/>
+            <a:ext cx="3052800" cy="1612800"/>
           </a:xfrm>
           <a:prstGeom prst="rect">
             <a:avLst/>
           </a:prstGeom>
           <a:noFill/>
-        </p:spPr>
-        <p:txBody>
-          <a:bodyPr wrap="square" lIns="0" rIns="0" tIns="0" bIns="0" anchor="t">
-            <a:spAutoFit/>
-          </a:bodyPr>
-          <a:lstStyle/>
-          <a:p>
-            <a:pPr algn="l">
-              <a:lnSpc>
-                <a:spcPts val="1015"/>
-              </a:lnSpc>
-            </a:pPr>
-            <a:r>
-              <a:rPr sz="700" b="1" spc="200">
-                <a:solidFill>
-                  <a:srgbClr val="6B7280"/>
-                </a:solidFill>
-                <a:latin typeface="맑은 고딕"/>
-                <a:ea typeface="맑은 고딕"/>
-              </a:rPr>
-              <a:t>스튜디오 이름</a:t>
-            </a:r>
-          </a:p>
-        </p:txBody>
-      </p:sp>
-      <p:sp>
-        <p:nvSpPr>
-          <p:cNvPr id="3" name="Oval 2"/>
+          <a:ln w="3600">
+            <a:solidFill>
+              <a:srgbClr val="E3E5E9"/>
+            </a:solidFill>
+          </a:ln>
+        </p:spPr>
+        <p:txBody>
+          <a:bodyPr rtlCol="0" anchor="ctr"/>
+          <a:lstStyle/>
+          <a:p>
+            <a:pPr algn="ctr"/>
+          </a:p>
+        </p:txBody>
+      </p:sp>
+      <p:sp>
+        <p:nvSpPr>
+          <p:cNvPr id="3" name="Rectangle 2"/>
           <p:cNvSpPr/>
           <p:nvPr/>
         </p:nvSpPr>
         <p:spPr>
           <a:xfrm>
-            <a:off x="2955600" y="241200"/>
-            <a:ext cx="64800" cy="64800"/>
-          </a:xfrm>
-          <a:prstGeom prst="ellipse">
+            <a:off x="252000" y="252000"/>
+            <a:ext cx="79200" cy="79200"/>
+          </a:xfrm>
+          <a:prstGeom prst="rect">
             <a:avLst/>
           </a:prstGeom>
           <a:solidFill>
@@ -3174,8 +3163,8 @@
         </p:nvSpPr>
         <p:spPr>
           <a:xfrm>
-            <a:off x="252000" y="676800"/>
-            <a:ext cx="2520000" cy="360000"/>
+            <a:off x="396000" y="259200"/>
+            <a:ext cx="1512000" cy="123826"/>
           </a:xfrm>
           <a:prstGeom prst="rect">
             <a:avLst/>
@@ -3190,11 +3179,72 @@
           <a:p>
             <a:pPr algn="l">
               <a:lnSpc>
-                <a:spcPts val="3190"/>
+                <a:spcPts val="942"/>
               </a:lnSpc>
             </a:pPr>
             <a:r>
-              <a:rPr sz="2200" b="1">
+              <a:rPr sz="650" b="1" spc="220">
+                <a:solidFill>
+                  <a:srgbClr val="6B7280"/>
+                </a:solidFill>
+                <a:latin typeface="맑은 고딕"/>
+                <a:ea typeface="맑은 고딕"/>
+              </a:rPr>
+              <a:t>스튜디오 이름</a:t>
+            </a:r>
+          </a:p>
+        </p:txBody>
+      </p:sp>
+      <p:cxnSp>
+        <p:nvCxnSpPr>
+          <p:cNvPr id="5" name="Connector 4"/>
+          <p:cNvCxnSpPr/>
+          <p:nvPr/>
+        </p:nvCxnSpPr>
+        <p:spPr>
+          <a:xfrm>
+            <a:off x="252000" y="446400"/>
+            <a:ext cx="2736000" cy="0"/>
+          </a:xfrm>
+          <a:prstGeom prst="line">
+            <a:avLst/>
+          </a:prstGeom>
+          <a:ln w="3600">
+            <a:solidFill>
+              <a:srgbClr val="E3E5E9"/>
+            </a:solidFill>
+          </a:ln>
+        </p:spPr>
+      </p:cxnSp>
+      <p:sp>
+        <p:nvSpPr>
+          <p:cNvPr id="6" name="텍스트"/>
+          <p:cNvSpPr txBox="1"/>
+          <p:nvPr/>
+        </p:nvSpPr>
+        <p:spPr>
+          <a:xfrm>
+            <a:off x="252000" y="964800"/>
+            <a:ext cx="1800000" cy="237600"/>
+          </a:xfrm>
+          <a:prstGeom prst="rect">
+            <a:avLst/>
+          </a:prstGeom>
+          <a:noFill/>
+        </p:spPr>
+        <p:txBody>
+          <a:bodyPr wrap="square" lIns="0" rIns="0" tIns="0" bIns="0" anchor="t">
+            <a:spAutoFit/>
+          </a:bodyPr>
+          <a:lstStyle/>
+          <a:p>
+            <a:pPr algn="l">
+              <a:lnSpc>
+                <a:spcPts val="1957"/>
+              </a:lnSpc>
+            </a:pPr>
+            <a:r>
+              <a:rPr sz="1350" b="1" spc="120">
                 <a:solidFill>
                   <a:srgbClr val="12151C"/>
                 </a:solidFill>
@@ -3208,14 +3258,14 @@
       </p:sp>
       <p:sp>
         <p:nvSpPr>
-          <p:cNvPr id="5" name="텍스트"/>
+          <p:cNvPr id="7" name="텍스트"/>
           <p:cNvSpPr txBox="1"/>
           <p:nvPr/>
         </p:nvSpPr>
         <p:spPr>
           <a:xfrm>
-            <a:off x="252000" y="1080000"/>
-            <a:ext cx="2520000" cy="171451"/>
+            <a:off x="252000" y="1216800"/>
+            <a:ext cx="1800000" cy="133351"/>
           </a:xfrm>
           <a:prstGeom prst="rect">
             <a:avLst/>
@@ -3230,11 +3280,11 @@
           <a:p>
             <a:pPr algn="l">
               <a:lnSpc>
-                <a:spcPts val="1305"/>
+                <a:spcPts val="1015"/>
               </a:lnSpc>
             </a:pPr>
             <a:r>
-              <a:rPr sz="900" b="0">
+              <a:rPr sz="700" b="0" spc="60">
                 <a:solidFill>
                   <a:srgbClr val="6B7280"/>
                 </a:solidFill>
@@ -3248,19 +3298,19 @@
       </p:sp>
       <p:cxnSp>
         <p:nvCxnSpPr>
-          <p:cNvPr id="6" name="Connector 5"/>
+          <p:cNvPr id="8" name="Connector 7"/>
           <p:cNvCxnSpPr/>
           <p:nvPr/>
         </p:nvCxnSpPr>
         <p:spPr>
           <a:xfrm>
-            <a:off x="252000" y="1339200"/>
-            <a:ext cx="2736000" cy="0"/>
+            <a:off x="1872000" y="943200"/>
+            <a:ext cx="0" cy="604800"/>
           </a:xfrm>
           <a:prstGeom prst="line">
             <a:avLst/>
           </a:prstGeom>
-          <a:ln w="5760">
+          <a:ln w="3600">
             <a:solidFill>
               <a:srgbClr val="E3E5E9"/>
             </a:solidFill>
@@ -3269,14 +3319,14 @@
       </p:cxnSp>
       <p:sp>
         <p:nvSpPr>
-          <p:cNvPr id="7" name="텍스트"/>
+          <p:cNvPr id="9" name="텍스트"/>
           <p:cNvSpPr txBox="1"/>
           <p:nvPr/>
         </p:nvSpPr>
         <p:spPr>
           <a:xfrm>
-            <a:off x="252000" y="1411200"/>
-            <a:ext cx="792000" cy="129541"/>
+            <a:off x="2016000" y="1033200"/>
+            <a:ext cx="302400" cy="91441"/>
           </a:xfrm>
           <a:prstGeom prst="rect">
             <a:avLst/>
@@ -3291,11 +3341,51 @@
           <a:p>
             <a:pPr algn="l">
               <a:lnSpc>
-                <a:spcPts val="986"/>
+                <a:spcPts val="696"/>
               </a:lnSpc>
             </a:pPr>
             <a:r>
-              <a:rPr sz="680" b="0">
+              <a:rPr sz="480" b="1" spc="140">
+                <a:solidFill>
+                  <a:srgbClr val="6B7280"/>
+                </a:solidFill>
+                <a:latin typeface="맑은 고딕"/>
+                <a:ea typeface="맑은 고딕"/>
+              </a:rPr>
+              <a:t>TEL</a:t>
+            </a:r>
+          </a:p>
+        </p:txBody>
+      </p:sp>
+      <p:sp>
+        <p:nvSpPr>
+          <p:cNvPr id="10" name="텍스트"/>
+          <p:cNvSpPr txBox="1"/>
+          <p:nvPr/>
+        </p:nvSpPr>
+        <p:spPr>
+          <a:xfrm>
+            <a:off x="2318400" y="1022400"/>
+            <a:ext cx="972000" cy="123826"/>
+          </a:xfrm>
+          <a:prstGeom prst="rect">
+            <a:avLst/>
+          </a:prstGeom>
+          <a:noFill/>
+        </p:spPr>
+        <p:txBody>
+          <a:bodyPr wrap="square" lIns="0" rIns="0" tIns="0" bIns="0" anchor="t">
+            <a:spAutoFit/>
+          </a:bodyPr>
+          <a:lstStyle/>
+          <a:p>
+            <a:pPr algn="l">
+              <a:lnSpc>
+                <a:spcPts val="942"/>
+              </a:lnSpc>
+            </a:pPr>
+            <a:r>
+              <a:rPr sz="650" b="0">
                 <a:solidFill>
                   <a:srgbClr val="12151C"/>
                 </a:solidFill>
@@ -3309,14 +3399,14 @@
       </p:sp>
       <p:sp>
         <p:nvSpPr>
-          <p:cNvPr id="8" name="텍스트"/>
+          <p:cNvPr id="11" name="텍스트"/>
           <p:cNvSpPr txBox="1"/>
           <p:nvPr/>
         </p:nvSpPr>
         <p:spPr>
           <a:xfrm>
-            <a:off x="1080000" y="1411200"/>
-            <a:ext cx="900000" cy="129541"/>
+            <a:off x="2016000" y="1177200"/>
+            <a:ext cx="302400" cy="91441"/>
           </a:xfrm>
           <a:prstGeom prst="rect">
             <a:avLst/>
@@ -3331,11 +3421,51 @@
           <a:p>
             <a:pPr algn="l">
               <a:lnSpc>
-                <a:spcPts val="986"/>
+                <a:spcPts val="696"/>
               </a:lnSpc>
             </a:pPr>
             <a:r>
-              <a:rPr sz="680" b="0">
+              <a:rPr sz="480" b="1" spc="140">
+                <a:solidFill>
+                  <a:srgbClr val="6B7280"/>
+                </a:solidFill>
+                <a:latin typeface="맑은 고딕"/>
+                <a:ea typeface="맑은 고딕"/>
+              </a:rPr>
+              <a:t>MAIL</a:t>
+            </a:r>
+          </a:p>
+        </p:txBody>
+      </p:sp>
+      <p:sp>
+        <p:nvSpPr>
+          <p:cNvPr id="12" name="텍스트"/>
+          <p:cNvSpPr txBox="1"/>
+          <p:nvPr/>
+        </p:nvSpPr>
+        <p:spPr>
+          <a:xfrm>
+            <a:off x="2318400" y="1166400"/>
+            <a:ext cx="972000" cy="123826"/>
+          </a:xfrm>
+          <a:prstGeom prst="rect">
+            <a:avLst/>
+          </a:prstGeom>
+          <a:noFill/>
+        </p:spPr>
+        <p:txBody>
+          <a:bodyPr wrap="square" lIns="0" rIns="0" tIns="0" bIns="0" anchor="t">
+            <a:spAutoFit/>
+          </a:bodyPr>
+          <a:lstStyle/>
+          <a:p>
+            <a:pPr algn="l">
+              <a:lnSpc>
+                <a:spcPts val="942"/>
+              </a:lnSpc>
+            </a:pPr>
+            <a:r>
+              <a:rPr sz="650" b="0">
                 <a:solidFill>
                   <a:srgbClr val="12151C"/>
                 </a:solidFill>
@@ -3349,14 +3479,14 @@
       </p:sp>
       <p:sp>
         <p:nvSpPr>
-          <p:cNvPr id="9" name="텍스트"/>
+          <p:cNvPr id="13" name="텍스트"/>
           <p:cNvSpPr txBox="1"/>
           <p:nvPr/>
         </p:nvSpPr>
         <p:spPr>
           <a:xfrm>
-            <a:off x="2052000" y="1411200"/>
-            <a:ext cx="972000" cy="129541"/>
+            <a:off x="2016000" y="1321200"/>
+            <a:ext cx="302400" cy="91441"/>
           </a:xfrm>
           <a:prstGeom prst="rect">
             <a:avLst/>
@@ -3371,11 +3501,51 @@
           <a:p>
             <a:pPr algn="l">
               <a:lnSpc>
-                <a:spcPts val="986"/>
+                <a:spcPts val="696"/>
               </a:lnSpc>
             </a:pPr>
             <a:r>
-              <a:rPr sz="680" b="0">
+              <a:rPr sz="480" b="1" spc="140">
+                <a:solidFill>
+                  <a:srgbClr val="6B7280"/>
+                </a:solidFill>
+                <a:latin typeface="맑은 고딕"/>
+                <a:ea typeface="맑은 고딕"/>
+              </a:rPr>
+              <a:t>ADDR</a:t>
+            </a:r>
+          </a:p>
+        </p:txBody>
+      </p:sp>
+      <p:sp>
+        <p:nvSpPr>
+          <p:cNvPr id="14" name="텍스트"/>
+          <p:cNvSpPr txBox="1"/>
+          <p:nvPr/>
+        </p:nvSpPr>
+        <p:spPr>
+          <a:xfrm>
+            <a:off x="2318400" y="1310400"/>
+            <a:ext cx="972000" cy="123826"/>
+          </a:xfrm>
+          <a:prstGeom prst="rect">
+            <a:avLst/>
+          </a:prstGeom>
+          <a:noFill/>
+        </p:spPr>
+        <p:txBody>
+          <a:bodyPr wrap="square" lIns="0" rIns="0" tIns="0" bIns="0" anchor="t">
+            <a:spAutoFit/>
+          </a:bodyPr>
+          <a:lstStyle/>
+          <a:p>
+            <a:pPr algn="l">
+              <a:lnSpc>
+                <a:spcPts val="942"/>
+              </a:lnSpc>
+            </a:pPr>
+            <a:r>
+              <a:rPr sz="650" b="0">
                 <a:solidFill>
                   <a:srgbClr val="12151C"/>
                 </a:solidFill>
@@ -3383,126 +3553,6 @@
                 <a:ea typeface="맑은 고딕"/>
               </a:rPr>
               <a:t>주소를 입력해 주세요</a:t>
-            </a:r>
-          </a:p>
-        </p:txBody>
-      </p:sp>
-      <p:sp>
-        <p:nvSpPr>
-          <p:cNvPr id="10" name="텍스트"/>
-          <p:cNvSpPr txBox="1"/>
-          <p:nvPr/>
-        </p:nvSpPr>
-        <p:spPr>
-          <a:xfrm>
-            <a:off x="252000" y="1526400"/>
-            <a:ext cx="216000" cy="95251"/>
-          </a:xfrm>
-          <a:prstGeom prst="rect">
-            <a:avLst/>
-          </a:prstGeom>
-          <a:noFill/>
-        </p:spPr>
-        <p:txBody>
-          <a:bodyPr wrap="square" lIns="0" rIns="0" tIns="0" bIns="0" anchor="t">
-            <a:spAutoFit/>
-          </a:bodyPr>
-          <a:lstStyle/>
-          <a:p>
-            <a:pPr algn="l">
-              <a:lnSpc>
-                <a:spcPts val="725"/>
-              </a:lnSpc>
-            </a:pPr>
-            <a:r>
-              <a:rPr sz="500" b="1" spc="120">
-                <a:solidFill>
-                  <a:srgbClr val="6B7280"/>
-                </a:solidFill>
-                <a:latin typeface="맑은 고딕"/>
-                <a:ea typeface="맑은 고딕"/>
-              </a:rPr>
-              <a:t>TEL</a:t>
-            </a:r>
-          </a:p>
-        </p:txBody>
-      </p:sp>
-      <p:sp>
-        <p:nvSpPr>
-          <p:cNvPr id="11" name="텍스트"/>
-          <p:cNvSpPr txBox="1"/>
-          <p:nvPr/>
-        </p:nvSpPr>
-        <p:spPr>
-          <a:xfrm>
-            <a:off x="1080000" y="1526400"/>
-            <a:ext cx="216000" cy="95251"/>
-          </a:xfrm>
-          <a:prstGeom prst="rect">
-            <a:avLst/>
-          </a:prstGeom>
-          <a:noFill/>
-        </p:spPr>
-        <p:txBody>
-          <a:bodyPr wrap="square" lIns="0" rIns="0" tIns="0" bIns="0" anchor="t">
-            <a:spAutoFit/>
-          </a:bodyPr>
-          <a:lstStyle/>
-          <a:p>
-            <a:pPr algn="l">
-              <a:lnSpc>
-                <a:spcPts val="725"/>
-              </a:lnSpc>
-            </a:pPr>
-            <a:r>
-              <a:rPr sz="500" b="1" spc="120">
-                <a:solidFill>
-                  <a:srgbClr val="6B7280"/>
-                </a:solidFill>
-                <a:latin typeface="맑은 고딕"/>
-                <a:ea typeface="맑은 고딕"/>
-              </a:rPr>
-              <a:t>MAIL</a:t>
-            </a:r>
-          </a:p>
-        </p:txBody>
-      </p:sp>
-      <p:sp>
-        <p:nvSpPr>
-          <p:cNvPr id="12" name="텍스트"/>
-          <p:cNvSpPr txBox="1"/>
-          <p:nvPr/>
-        </p:nvSpPr>
-        <p:spPr>
-          <a:xfrm>
-            <a:off x="2052000" y="1526400"/>
-            <a:ext cx="216000" cy="95251"/>
-          </a:xfrm>
-          <a:prstGeom prst="rect">
-            <a:avLst/>
-          </a:prstGeom>
-          <a:noFill/>
-        </p:spPr>
-        <p:txBody>
-          <a:bodyPr wrap="square" lIns="0" rIns="0" tIns="0" bIns="0" anchor="t">
-            <a:spAutoFit/>
-          </a:bodyPr>
-          <a:lstStyle/>
-          <a:p>
-            <a:pPr algn="l">
-              <a:lnSpc>
-                <a:spcPts val="725"/>
-              </a:lnSpc>
-            </a:pPr>
-            <a:r>
-              <a:rPr sz="500" b="1" spc="120">
-                <a:solidFill>
-                  <a:srgbClr val="6B7280"/>
-                </a:solidFill>
-                <a:latin typeface="맑은 고딕"/>
-                <a:ea typeface="맑은 고딕"/>
-              </a:rPr>
-              <a:t>ADDR</a:t>
             </a:r>
           </a:p>
         </p:txBody>
@@ -3535,43 +3585,14 @@
       <p:grpSpPr/>
       <p:sp>
         <p:nvSpPr>
-          <p:cNvPr id="2" name="Oval 1"/>
-          <p:cNvSpPr/>
-          <p:nvPr/>
-        </p:nvSpPr>
-        <p:spPr>
-          <a:xfrm>
-            <a:off x="1411200" y="295200"/>
-            <a:ext cx="417600" cy="417600"/>
-          </a:xfrm>
-          <a:prstGeom prst="ellipse">
-            <a:avLst/>
-          </a:prstGeom>
-          <a:solidFill>
-            <a:srgbClr val="00A6A6"/>
-          </a:solidFill>
-          <a:ln>
-            <a:noFill/>
-          </a:ln>
-        </p:spPr>
-        <p:txBody>
-          <a:bodyPr rtlCol="0" anchor="ctr"/>
-          <a:lstStyle/>
-          <a:p>
-            <a:pPr algn="ctr"/>
-          </a:p>
-        </p:txBody>
-      </p:sp>
-      <p:sp>
-        <p:nvSpPr>
-          <p:cNvPr id="3" name="텍스트"/>
+          <p:cNvPr id="2" name="텍스트"/>
           <p:cNvSpPr txBox="1"/>
           <p:nvPr/>
         </p:nvSpPr>
         <p:spPr>
           <a:xfrm>
-            <a:off x="1368000" y="324000"/>
-            <a:ext cx="504000" cy="360000"/>
+            <a:off x="252000" y="252000"/>
+            <a:ext cx="1080000" cy="99061"/>
           </a:xfrm>
           <a:prstGeom prst="rect">
             <a:avLst/>
@@ -3579,79 +3600,39 @@
           <a:noFill/>
         </p:spPr>
         <p:txBody>
-          <a:bodyPr wrap="square" lIns="0" rIns="0" tIns="0" bIns="0" anchor="ctr">
+          <a:bodyPr wrap="square" lIns="0" rIns="0" tIns="0" bIns="0" anchor="t">
             <a:spAutoFit/>
           </a:bodyPr>
           <a:lstStyle/>
           <a:p>
-            <a:pPr algn="ctr">
+            <a:pPr algn="l">
               <a:lnSpc>
-                <a:spcPts val="3769"/>
+                <a:spcPts val="754"/>
               </a:lnSpc>
             </a:pPr>
             <a:r>
-              <a:rPr sz="2600" b="1">
+              <a:rPr sz="520" b="1" spc="240">
                 <a:solidFill>
-                  <a:srgbClr val="12151C"/>
+                  <a:srgbClr val="6B7280"/>
                 </a:solidFill>
                 <a:latin typeface="맑은 고딕"/>
                 <a:ea typeface="맑은 고딕"/>
               </a:rPr>
-              <a:t>스</a:t>
-            </a:r>
-          </a:p>
-        </p:txBody>
-      </p:sp>
-      <p:sp>
-        <p:nvSpPr>
-          <p:cNvPr id="4" name="텍스트"/>
-          <p:cNvSpPr txBox="1"/>
-          <p:nvPr/>
-        </p:nvSpPr>
-        <p:spPr>
-          <a:xfrm>
-            <a:off x="360000" y="820800"/>
-            <a:ext cx="2520000" cy="161926"/>
-          </a:xfrm>
-          <a:prstGeom prst="rect">
-            <a:avLst/>
-          </a:prstGeom>
-          <a:noFill/>
-        </p:spPr>
-        <p:txBody>
-          <a:bodyPr wrap="square" lIns="0" rIns="0" tIns="0" bIns="0" anchor="t">
-            <a:spAutoFit/>
-          </a:bodyPr>
-          <a:lstStyle/>
-          <a:p>
-            <a:pPr algn="ctr">
-              <a:lnSpc>
-                <a:spcPts val="1232"/>
-              </a:lnSpc>
-            </a:pPr>
-            <a:r>
-              <a:rPr sz="850" b="1" spc="200">
-                <a:solidFill>
-                  <a:srgbClr val="12151C"/>
-                </a:solidFill>
-                <a:latin typeface="맑은 고딕"/>
-                <a:ea typeface="맑은 고딕"/>
-              </a:rPr>
-              <a:t>스튜디오 이름</a:t>
-            </a:r>
-          </a:p>
-        </p:txBody>
-      </p:sp>
-      <p:sp>
-        <p:nvSpPr>
-          <p:cNvPr id="5" name="Rectangle 4"/>
+              <a:t>작업 분야</a:t>
+            </a:r>
+          </a:p>
+        </p:txBody>
+      </p:sp>
+      <p:sp>
+        <p:nvSpPr>
+          <p:cNvPr id="3" name="Rectangle 2"/>
           <p:cNvSpPr/>
           <p:nvPr/>
         </p:nvSpPr>
         <p:spPr>
           <a:xfrm>
-            <a:off x="1530000" y="1051200"/>
-            <a:ext cx="180000" cy="14400"/>
+            <a:off x="252000" y="367200"/>
+            <a:ext cx="108000" cy="14400"/>
           </a:xfrm>
           <a:prstGeom prst="rect">
             <a:avLst/>
@@ -3673,14 +3654,45 @@
       </p:sp>
       <p:sp>
         <p:nvSpPr>
-          <p:cNvPr id="6" name="텍스트"/>
+          <p:cNvPr id="4" name="Rounded Rectangle 3"/>
+          <p:cNvSpPr/>
+          <p:nvPr/>
+        </p:nvSpPr>
+        <p:spPr>
+          <a:xfrm>
+            <a:off x="252000" y="540000"/>
+            <a:ext cx="496933" cy="194361"/>
+          </a:xfrm>
+          <a:prstGeom prst="roundRect">
+            <a:avLst>
+              <a:gd name="adj" fmla="val 50000"/>
+            </a:avLst>
+          </a:prstGeom>
+          <a:noFill/>
+          <a:ln w="3600">
+            <a:solidFill>
+              <a:srgbClr val="6B7280"/>
+            </a:solidFill>
+          </a:ln>
+        </p:spPr>
+        <p:txBody>
+          <a:bodyPr rtlCol="0" anchor="ctr"/>
+          <a:lstStyle/>
+          <a:p>
+            <a:pPr algn="ctr"/>
+          </a:p>
+        </p:txBody>
+      </p:sp>
+      <p:sp>
+        <p:nvSpPr>
+          <p:cNvPr id="5" name="텍스트"/>
           <p:cNvSpPr txBox="1"/>
           <p:nvPr/>
         </p:nvSpPr>
         <p:spPr>
           <a:xfrm>
-            <a:off x="540000" y="1188000"/>
-            <a:ext cx="2160000" cy="360000"/>
+            <a:off x="252000" y="540000"/>
+            <a:ext cx="496933" cy="194361"/>
           </a:xfrm>
           <a:prstGeom prst="rect">
             <a:avLst/>
@@ -3688,25 +3700,388 @@
           <a:noFill/>
         </p:spPr>
         <p:txBody>
+          <a:bodyPr wrap="square" lIns="0" rIns="0" tIns="0" bIns="0" anchor="ctr">
+            <a:spAutoFit/>
+          </a:bodyPr>
+          <a:lstStyle/>
+          <a:p>
+            <a:pPr algn="ctr">
+              <a:lnSpc>
+                <a:spcPts val="986"/>
+              </a:lnSpc>
+            </a:pPr>
+            <a:r>
+              <a:rPr sz="680" b="0">
+                <a:solidFill>
+                  <a:srgbClr val="12151C"/>
+                </a:solidFill>
+                <a:latin typeface="맑은 고딕"/>
+                <a:ea typeface="맑은 고딕"/>
+              </a:rPr>
+              <a:t>일러스트</a:t>
+            </a:r>
+          </a:p>
+        </p:txBody>
+      </p:sp>
+      <p:sp>
+        <p:nvSpPr>
+          <p:cNvPr id="6" name="Rounded Rectangle 5"/>
+          <p:cNvSpPr/>
+          <p:nvPr/>
+        </p:nvSpPr>
+        <p:spPr>
+          <a:xfrm>
+            <a:off x="799333" y="540000"/>
+            <a:ext cx="581567" cy="194361"/>
+          </a:xfrm>
+          <a:prstGeom prst="roundRect">
+            <a:avLst>
+              <a:gd name="adj" fmla="val 50000"/>
+            </a:avLst>
+          </a:prstGeom>
+          <a:noFill/>
+          <a:ln w="3600">
+            <a:solidFill>
+              <a:srgbClr val="6B7280"/>
+            </a:solidFill>
+          </a:ln>
+        </p:spPr>
+        <p:txBody>
+          <a:bodyPr rtlCol="0" anchor="ctr"/>
+          <a:lstStyle/>
+          <a:p>
+            <a:pPr algn="ctr"/>
+          </a:p>
+        </p:txBody>
+      </p:sp>
+      <p:sp>
+        <p:nvSpPr>
+          <p:cNvPr id="7" name="텍스트"/>
+          <p:cNvSpPr txBox="1"/>
+          <p:nvPr/>
+        </p:nvSpPr>
+        <p:spPr>
+          <a:xfrm>
+            <a:off x="799333" y="540000"/>
+            <a:ext cx="581567" cy="194361"/>
+          </a:xfrm>
+          <a:prstGeom prst="rect">
+            <a:avLst/>
+          </a:prstGeom>
+          <a:noFill/>
+        </p:spPr>
+        <p:txBody>
+          <a:bodyPr wrap="square" lIns="0" rIns="0" tIns="0" bIns="0" anchor="ctr">
+            <a:spAutoFit/>
+          </a:bodyPr>
+          <a:lstStyle/>
+          <a:p>
+            <a:pPr algn="ctr">
+              <a:lnSpc>
+                <a:spcPts val="986"/>
+              </a:lnSpc>
+            </a:pPr>
+            <a:r>
+              <a:rPr sz="680" b="0">
+                <a:solidFill>
+                  <a:srgbClr val="12151C"/>
+                </a:solidFill>
+                <a:latin typeface="맑은 고딕"/>
+                <a:ea typeface="맑은 고딕"/>
+              </a:rPr>
+              <a:t>제품 촬영</a:t>
+            </a:r>
+          </a:p>
+        </p:txBody>
+      </p:sp>
+      <p:sp>
+        <p:nvSpPr>
+          <p:cNvPr id="8" name="Rounded Rectangle 7"/>
+          <p:cNvSpPr/>
+          <p:nvPr/>
+        </p:nvSpPr>
+        <p:spPr>
+          <a:xfrm>
+            <a:off x="1431300" y="540000"/>
+            <a:ext cx="581567" cy="194361"/>
+          </a:xfrm>
+          <a:prstGeom prst="roundRect">
+            <a:avLst>
+              <a:gd name="adj" fmla="val 50000"/>
+            </a:avLst>
+          </a:prstGeom>
+          <a:noFill/>
+          <a:ln w="3600">
+            <a:solidFill>
+              <a:srgbClr val="6B7280"/>
+            </a:solidFill>
+          </a:ln>
+        </p:spPr>
+        <p:txBody>
+          <a:bodyPr rtlCol="0" anchor="ctr"/>
+          <a:lstStyle/>
+          <a:p>
+            <a:pPr algn="ctr"/>
+          </a:p>
+        </p:txBody>
+      </p:sp>
+      <p:sp>
+        <p:nvSpPr>
+          <p:cNvPr id="9" name="텍스트"/>
+          <p:cNvSpPr txBox="1"/>
+          <p:nvPr/>
+        </p:nvSpPr>
+        <p:spPr>
+          <a:xfrm>
+            <a:off x="1431300" y="540000"/>
+            <a:ext cx="581567" cy="194361"/>
+          </a:xfrm>
+          <a:prstGeom prst="rect">
+            <a:avLst/>
+          </a:prstGeom>
+          <a:noFill/>
+        </p:spPr>
+        <p:txBody>
+          <a:bodyPr wrap="square" lIns="0" rIns="0" tIns="0" bIns="0" anchor="ctr">
+            <a:spAutoFit/>
+          </a:bodyPr>
+          <a:lstStyle/>
+          <a:p>
+            <a:pPr algn="ctr">
+              <a:lnSpc>
+                <a:spcPts val="986"/>
+              </a:lnSpc>
+            </a:pPr>
+            <a:r>
+              <a:rPr sz="680" b="0">
+                <a:solidFill>
+                  <a:srgbClr val="12151C"/>
+                </a:solidFill>
+                <a:latin typeface="맑은 고딕"/>
+                <a:ea typeface="맑은 고딕"/>
+              </a:rPr>
+              <a:t>포트폴리오</a:t>
+            </a:r>
+          </a:p>
+        </p:txBody>
+      </p:sp>
+      <p:cxnSp>
+        <p:nvCxnSpPr>
+          <p:cNvPr id="10" name="Connector 9"/>
+          <p:cNvCxnSpPr/>
+          <p:nvPr/>
+        </p:nvCxnSpPr>
+        <p:spPr>
+          <a:xfrm>
+            <a:off x="252000" y="1339200"/>
+            <a:ext cx="2736000" cy="0"/>
+          </a:xfrm>
+          <a:prstGeom prst="line">
+            <a:avLst/>
+          </a:prstGeom>
+          <a:ln w="3600">
+            <a:solidFill>
+              <a:srgbClr val="DCDFE4"/>
+            </a:solidFill>
+          </a:ln>
+        </p:spPr>
+      </p:cxnSp>
+      <p:sp>
+        <p:nvSpPr>
+          <p:cNvPr id="11" name="텍스트"/>
+          <p:cNvSpPr txBox="1"/>
+          <p:nvPr/>
+        </p:nvSpPr>
+        <p:spPr>
+          <a:xfrm>
+            <a:off x="252000" y="1422000"/>
+            <a:ext cx="396000" cy="91441"/>
+          </a:xfrm>
+          <a:prstGeom prst="rect">
+            <a:avLst/>
+          </a:prstGeom>
+          <a:noFill/>
+        </p:spPr>
+        <p:txBody>
           <a:bodyPr wrap="square" lIns="0" rIns="0" tIns="0" bIns="0" anchor="t">
             <a:spAutoFit/>
           </a:bodyPr>
           <a:lstStyle/>
           <a:p>
-            <a:pPr algn="ctr">
+            <a:pPr algn="l">
               <a:lnSpc>
-                <a:spcPts val="1305"/>
+                <a:spcPts val="696"/>
               </a:lnSpc>
             </a:pPr>
             <a:r>
-              <a:rPr sz="900" b="1">
+              <a:rPr sz="480" b="1" spc="140">
                 <a:solidFill>
                   <a:srgbClr val="6B7280"/>
                 </a:solidFill>
                 <a:latin typeface="맑은 고딕"/>
                 <a:ea typeface="맑은 고딕"/>
               </a:rPr>
-              <a:t>작은 로고에 큰 마음을 담아</a:t>
+              <a:t>HOURS</a:t>
+            </a:r>
+          </a:p>
+        </p:txBody>
+      </p:sp>
+      <p:sp>
+        <p:nvSpPr>
+          <p:cNvPr id="12" name="텍스트"/>
+          <p:cNvSpPr txBox="1"/>
+          <p:nvPr/>
+        </p:nvSpPr>
+        <p:spPr>
+          <a:xfrm>
+            <a:off x="648000" y="1411200"/>
+            <a:ext cx="2340000" cy="121921"/>
+          </a:xfrm>
+          <a:prstGeom prst="rect">
+            <a:avLst/>
+          </a:prstGeom>
+          <a:noFill/>
+        </p:spPr>
+        <p:txBody>
+          <a:bodyPr wrap="square" lIns="0" rIns="0" tIns="0" bIns="0" anchor="t">
+            <a:spAutoFit/>
+          </a:bodyPr>
+          <a:lstStyle/>
+          <a:p>
+            <a:pPr algn="l">
+              <a:lnSpc>
+                <a:spcPts val="927"/>
+              </a:lnSpc>
+            </a:pPr>
+            <a:r>
+              <a:rPr sz="640" b="0">
+                <a:solidFill>
+                  <a:srgbClr val="12151C"/>
+                </a:solidFill>
+                <a:latin typeface="맑은 고딕"/>
+                <a:ea typeface="맑은 고딕"/>
+              </a:rPr>
+              <a:t>평일 10:00 – 19:00</a:t>
+            </a:r>
+          </a:p>
+        </p:txBody>
+      </p:sp>
+      <p:sp>
+        <p:nvSpPr>
+          <p:cNvPr id="13" name="텍스트"/>
+          <p:cNvSpPr txBox="1"/>
+          <p:nvPr/>
+        </p:nvSpPr>
+        <p:spPr>
+          <a:xfrm>
+            <a:off x="252000" y="1580400"/>
+            <a:ext cx="396000" cy="91441"/>
+          </a:xfrm>
+          <a:prstGeom prst="rect">
+            <a:avLst/>
+          </a:prstGeom>
+          <a:noFill/>
+        </p:spPr>
+        <p:txBody>
+          <a:bodyPr wrap="square" lIns="0" rIns="0" tIns="0" bIns="0" anchor="t">
+            <a:spAutoFit/>
+          </a:bodyPr>
+          <a:lstStyle/>
+          <a:p>
+            <a:pPr algn="l">
+              <a:lnSpc>
+                <a:spcPts val="696"/>
+              </a:lnSpc>
+            </a:pPr>
+            <a:r>
+              <a:rPr sz="480" b="1" spc="140">
+                <a:solidFill>
+                  <a:srgbClr val="6B7280"/>
+                </a:solidFill>
+                <a:latin typeface="맑은 고딕"/>
+                <a:ea typeface="맑은 고딕"/>
+              </a:rPr>
+              <a:t>WEB</a:t>
+            </a:r>
+          </a:p>
+        </p:txBody>
+      </p:sp>
+      <p:sp>
+        <p:nvSpPr>
+          <p:cNvPr id="14" name="텍스트"/>
+          <p:cNvSpPr txBox="1"/>
+          <p:nvPr/>
+        </p:nvSpPr>
+        <p:spPr>
+          <a:xfrm>
+            <a:off x="648000" y="1569600"/>
+            <a:ext cx="2340000" cy="121921"/>
+          </a:xfrm>
+          <a:prstGeom prst="rect">
+            <a:avLst/>
+          </a:prstGeom>
+          <a:noFill/>
+        </p:spPr>
+        <p:txBody>
+          <a:bodyPr wrap="square" lIns="0" rIns="0" tIns="0" bIns="0" anchor="t">
+            <a:spAutoFit/>
+          </a:bodyPr>
+          <a:lstStyle/>
+          <a:p>
+            <a:pPr algn="l">
+              <a:lnSpc>
+                <a:spcPts val="927"/>
+              </a:lnSpc>
+            </a:pPr>
+            <a:r>
+              <a:rPr sz="640" b="0">
+                <a:solidFill>
+                  <a:srgbClr val="12151C"/>
+                </a:solidFill>
+                <a:latin typeface="맑은 고딕"/>
+                <a:ea typeface="맑은 고딕"/>
+              </a:rPr>
+              <a:t>www.example.com</a:t>
+            </a:r>
+          </a:p>
+        </p:txBody>
+      </p:sp>
+      <p:sp>
+        <p:nvSpPr>
+          <p:cNvPr id="15" name="텍스트"/>
+          <p:cNvSpPr txBox="1"/>
+          <p:nvPr/>
+        </p:nvSpPr>
+        <p:spPr>
+          <a:xfrm>
+            <a:off x="1548000" y="1411200"/>
+            <a:ext cx="1440000" cy="123826"/>
+          </a:xfrm>
+          <a:prstGeom prst="rect">
+            <a:avLst/>
+          </a:prstGeom>
+          <a:noFill/>
+        </p:spPr>
+        <p:txBody>
+          <a:bodyPr wrap="square" lIns="0" rIns="0" tIns="0" bIns="0" anchor="t">
+            <a:spAutoFit/>
+          </a:bodyPr>
+          <a:lstStyle/>
+          <a:p>
+            <a:pPr algn="r">
+              <a:lnSpc>
+                <a:spcPts val="942"/>
+              </a:lnSpc>
+            </a:pPr>
+            <a:r>
+              <a:rPr sz="650" b="1" spc="220">
+                <a:solidFill>
+                  <a:srgbClr val="6B7280"/>
+                </a:solidFill>
+                <a:latin typeface="맑은 고딕"/>
+                <a:ea typeface="맑은 고딕"/>
+              </a:rPr>
+              <a:t>스튜디오 이름</a:t>
             </a:r>
           </a:p>
         </p:txBody>
